--- a/it/slides/08-Architettura_dei_Calcolatori-Algebra_di_Boole_1-Lab.pptx
+++ b/it/slides/08-Architettura_dei_Calcolatori-Algebra_di_Boole_1-Lab.pptx
@@ -126,19 +126,19 @@
   <p:extLst>
     <p:ext uri="{521415D9-36F7-43E2-AB2F-B90AF26B5E84}">
       <p14:sectionLst xmlns:p14="http://schemas.microsoft.com/office/powerpoint/2010/main">
-        <p14:section name="Apertura" id="{8eded6c3-6502-3b28-06ab-2bc2c198bc10}">
+        <p14:section name="Apertura" id="{ee90b659-ea92-2a5e-48cb-fa46469bf605}">
           <p14:sldIdLst>
             <p14:sldId id="256"/>
             <p14:sldId id="257"/>
           </p14:sldIdLst>
         </p14:section>
-        <p14:section name="Riscaldamento sulla macchina" id="{a63c68d8-d8b8-ff48-b9d4-ef2ad200c62b}">
+        <p14:section name="Riscaldamento sulla macchina" id="{0b71a69f-ac9e-dd83-f55a-d736c57e246c}">
           <p14:sldIdLst>
             <p14:sldId id="258"/>
             <p14:sldId id="259"/>
           </p14:sldIdLst>
         </p14:section>
-        <p14:section name="Ritorno alla macchina" id="{73fda079-2dd5-a315-0bc6-323da4f63f43}">
+        <p14:section name="Ritorno alla macchina" id="{3cea00b7-9ac3-06cd-6338-b7d2d3aaa751}">
           <p14:sldIdLst>
             <p14:sldId id="260"/>
             <p14:sldId id="261"/>
@@ -146,7 +146,7 @@
             <p14:sldId id="263"/>
           </p14:sldIdLst>
         </p14:section>
-        <p14:section name="Il programma completo" id="{30584706-ad43-6ee4-6b43-ea8bc81f8b7f}">
+        <p14:section name="Il programma completo" id="{038b81a3-bec0-9a88-5e64-5069942baa08}">
           <p14:sldIdLst>
             <p14:sldId id="264"/>
             <p14:sldId id="265"/>
@@ -156,7 +156,7 @@
             <p14:sldId id="269"/>
           </p14:sldIdLst>
         </p14:section>
-        <p14:section name="Eseguire e provare" id="{a721322d-52ce-ceab-ddb6-e75fdfd1bdd2}">
+        <p14:section name="Eseguire e provare" id="{5c2d49a7-3acd-8f1c-f4d5-bf8c79f3d3b8}">
           <p14:sldIdLst>
             <p14:sldId id="270"/>
             <p14:sldId id="271"/>
@@ -165,7 +165,7 @@
             <p14:sldId id="274"/>
           </p14:sldIdLst>
         </p14:section>
-        <p14:section name="Esercizi" id="{8b93d32b-d0b0-12b7-425b-503059722e71}">
+        <p14:section name="Esercizi" id="{f7640a9e-6b0d-6889-21fa-d968098310fb}">
           <p14:sldIdLst>
             <p14:sldId id="275"/>
           </p14:sldIdLst>

--- a/it/slides/08-Architettura_dei_Calcolatori-Algebra_di_Boole_1-Lab.pptx
+++ b/it/slides/08-Architettura_dei_Calcolatori-Algebra_di_Boole_1-Lab.pptx
@@ -126,19 +126,19 @@
   <p:extLst>
     <p:ext uri="{521415D9-36F7-43E2-AB2F-B90AF26B5E84}">
       <p14:sectionLst xmlns:p14="http://schemas.microsoft.com/office/powerpoint/2010/main">
-        <p14:section name="Apertura" id="{ee90b659-ea92-2a5e-48cb-fa46469bf605}">
+        <p14:section name="Apertura" id="{e1a60856-db90-e218-f3d9-a5b9f663a33b}">
           <p14:sldIdLst>
             <p14:sldId id="256"/>
             <p14:sldId id="257"/>
           </p14:sldIdLst>
         </p14:section>
-        <p14:section name="Riscaldamento sulla macchina" id="{0b71a69f-ac9e-dd83-f55a-d736c57e246c}">
+        <p14:section name="Riscaldamento sulla macchina" id="{2162af99-46bf-ca2f-e1a5-7fd908b20df3}">
           <p14:sldIdLst>
             <p14:sldId id="258"/>
             <p14:sldId id="259"/>
           </p14:sldIdLst>
         </p14:section>
-        <p14:section name="Ritorno alla macchina" id="{3cea00b7-9ac3-06cd-6338-b7d2d3aaa751}">
+        <p14:section name="Ritorno alla macchina" id="{726a6705-511f-6386-8dc7-8904d8b6180e}">
           <p14:sldIdLst>
             <p14:sldId id="260"/>
             <p14:sldId id="261"/>
@@ -146,7 +146,7 @@
             <p14:sldId id="263"/>
           </p14:sldIdLst>
         </p14:section>
-        <p14:section name="Il programma completo" id="{038b81a3-bec0-9a88-5e64-5069942baa08}">
+        <p14:section name="Il programma completo" id="{c1f2e2bf-5cbd-cb8d-3913-073f86f2f4f9}">
           <p14:sldIdLst>
             <p14:sldId id="264"/>
             <p14:sldId id="265"/>
@@ -156,7 +156,7 @@
             <p14:sldId id="269"/>
           </p14:sldIdLst>
         </p14:section>
-        <p14:section name="Eseguire e provare" id="{5c2d49a7-3acd-8f1c-f4d5-bf8c79f3d3b8}">
+        <p14:section name="Eseguire e provare" id="{91db4233-4cad-eae8-1686-fefbee0e9784}">
           <p14:sldIdLst>
             <p14:sldId id="270"/>
             <p14:sldId id="271"/>
@@ -165,7 +165,7 @@
             <p14:sldId id="274"/>
           </p14:sldIdLst>
         </p14:section>
-        <p14:section name="Esercizi" id="{f7640a9e-6b0d-6889-21fa-d968098310fb}">
+        <p14:section name="Esercizi" id="{84bffc15-aea4-d9b9-5c04-58f4764564bc}">
           <p14:sldIdLst>
             <p14:sldId id="275"/>
           </p14:sldIdLst>
@@ -576,7 +576,8 @@
               <a:rPr lang="en-US" dirty="0"/>
               <a:t>Questa è la presentazione del codice della Lezione 08. Mentre la presentazione della lezione sviluppa i concetti, questa raccoglie tutto ciò che si scrive e si esegue: ogni listato con il suo commento, il programma completo della lezione, il risultato che deve produrre, e la procedura per provarlo su ciascuno dei tre host. Le due presentazioni vanno lette insieme: i concetti spiegano il codice, e il codice dà ai concetti una conseguenza osservabile.
 Stato di apprendimento: DA COMPRENDERE OGGI, alla fine di questa lezione lo spiegate, lo seguite passo passo e lo applicate da soli; DA UTILIZZARE OGGI, oggi seguite e usate la ricetta; come funziona dentro si spiega più avanti, o non fa parte del corso; DA COMPRENDERE PIÙ AVANTI, riconoscete il nome e lo scopo; lo spiega una lezione successiva. Una slide senza etichetta è contesto: una storia, un esempio, una domanda, un esercizio.
-Stato di apprendimento di questa lezione. DA COMPRENDERE OGGI: le maschere di bit; l'architettura di von Neumann; analisi e sintesi; l'algebra di Boole; le porte logiche. DA UTILIZZARE OGGI: il programma completo, gli strumenti di PRG32 (si usa, non si studia, in questo corso). DA COMPRENDERE PIÙ AVANTI: minimizzazione, Karnaugh (Lezione 09). Una slide senza etichetta è contesto: una storia, un esempio, una domanda, un esercizio.</a:t>
+Stato di apprendimento di questa lezione. DA COMPRENDERE OGGI: le maschere di bit; l'architettura di von Neumann; analisi e sintesi; l'algebra di Boole; le porte logiche. DA UTILIZZARE OGGI: il programma completo, gli strumenti di PRG32 (si usa, non si studia, in questo corso). DA COMPRENDERE PIÙ AVANTI: minimizzazione, Karnaugh (Lezione 09). Una slide senza etichetta è contesto: una storia, un esempio, una domanda, un esercizio.
+Percorso. I risultati di oggi: (1) distinguere l'analisi di un circuito logico dalla sua sintesi; (2) applicare gli assiomi e i teoremi dell'algebra di Boole, compreso De Morgan; (3) porre a 1, azzerare e verificare bit con le maschere. Si appoggia su: l'architettura di von Neumann (Lezione 03). Prossimo passo: Lezione 09, Elementi di algebra di Boole.</a:t>
             </a:r>
             <a:endParaRPr lang="en-US" dirty="0"/>
           </a:p>
